--- a/docs/slides/banking-parser-platform.pptx
+++ b/docs/slides/banking-parser-platform.pptx
@@ -8815,7 +8815,7 @@
                           </a:solidFill>
                           <a:latin typeface="Calibri"/>
                         </a:rPr>
-                        <a:t>8 463</a:t>
+                        <a:t>8 261</a:t>
                       </a:r>
                     </a:p>
                   </a:txBody>
@@ -8837,7 +8837,7 @@
                           </a:solidFill>
                           <a:latin typeface="Calibri"/>
                         </a:rPr>
-                        <a:t>16 106</a:t>
+                        <a:t>14 198</a:t>
                       </a:r>
                     </a:p>
                   </a:txBody>
@@ -8881,7 +8881,7 @@
                           </a:solidFill>
                           <a:latin typeface="Calibri"/>
                         </a:rPr>
-                        <a:t>14 496</a:t>
+                        <a:t>14 433</a:t>
                       </a:r>
                     </a:p>
                   </a:txBody>
@@ -8927,7 +8927,7 @@
                           </a:solidFill>
                           <a:latin typeface="Calibri"/>
                         </a:rPr>
-                        <a:t>6 452</a:t>
+                        <a:t>6 374</a:t>
                       </a:r>
                     </a:p>
                   </a:txBody>
@@ -9039,7 +9039,7 @@
                           </a:solidFill>
                           <a:latin typeface="Calibri"/>
                         </a:rPr>
-                        <a:t>5 562</a:t>
+                        <a:t>5 473</a:t>
                       </a:r>
                     </a:p>
                   </a:txBody>
@@ -9083,7 +9083,7 @@
                           </a:solidFill>
                           <a:latin typeface="Calibri"/>
                         </a:rPr>
-                        <a:t>4 162</a:t>
+                        <a:t>4 110</a:t>
                       </a:r>
                     </a:p>
                   </a:txBody>
@@ -9105,7 +9105,7 @@
                           </a:solidFill>
                           <a:latin typeface="Calibri"/>
                         </a:rPr>
-                        <a:t>14 079</a:t>
+                        <a:t>14 121</a:t>
                       </a:r>
                     </a:p>
                   </a:txBody>
@@ -9151,7 +9151,7 @@
                           </a:solidFill>
                           <a:latin typeface="Calibri"/>
                         </a:rPr>
-                        <a:t>5 306</a:t>
+                        <a:t>5 228</a:t>
                       </a:r>
                     </a:p>
                   </a:txBody>
@@ -9173,7 +9173,7 @@
                           </a:solidFill>
                           <a:latin typeface="Calibri"/>
                         </a:rPr>
-                        <a:t>2 632</a:t>
+                        <a:t>2 818</a:t>
                       </a:r>
                     </a:p>
                   </a:txBody>
@@ -9263,7 +9263,7 @@
                           </a:solidFill>
                           <a:latin typeface="Calibri"/>
                         </a:rPr>
-                        <a:t>4 900</a:t>
+                        <a:t>4 942</a:t>
                       </a:r>
                     </a:p>
                   </a:txBody>
@@ -9285,7 +9285,7 @@
                           </a:solidFill>
                           <a:latin typeface="Calibri"/>
                         </a:rPr>
-                        <a:t>2 907</a:t>
+                        <a:t>2 889</a:t>
                       </a:r>
                     </a:p>
                   </a:txBody>
@@ -9307,7 +9307,7 @@
                           </a:solidFill>
                           <a:latin typeface="Calibri"/>
                         </a:rPr>
-                        <a:t>10 146</a:t>
+                        <a:t>11 416</a:t>
                       </a:r>
                     </a:p>
                   </a:txBody>
@@ -9329,7 +9329,7 @@
                           </a:solidFill>
                           <a:latin typeface="Calibri"/>
                         </a:rPr>
-                        <a:t>14 450</a:t>
+                        <a:t>14 267</a:t>
                       </a:r>
                     </a:p>
                   </a:txBody>
@@ -9397,7 +9397,7 @@
                           </a:solidFill>
                           <a:latin typeface="Calibri"/>
                         </a:rPr>
-                        <a:t>9 351</a:t>
+                        <a:t>9 188</a:t>
                       </a:r>
                     </a:p>
                   </a:txBody>
@@ -9419,7 +9419,7 @@
                           </a:solidFill>
                           <a:latin typeface="Calibri"/>
                         </a:rPr>
-                        <a:t>11 595</a:t>
+                        <a:t>11 615</a:t>
                       </a:r>
                     </a:p>
                   </a:txBody>
@@ -9441,7 +9441,7 @@
                           </a:solidFill>
                           <a:latin typeface="Calibri"/>
                         </a:rPr>
-                        <a:t>14 558</a:t>
+                        <a:t>13 009</a:t>
                       </a:r>
                     </a:p>
                   </a:txBody>
@@ -9465,7 +9465,7 @@
                           </a:solidFill>
                           <a:latin typeface="Calibri"/>
                         </a:rPr>
-                        <a:t>Spring Batch + fixedlength</a:t>
+                        <a:t>Spring Batch + ff4j</a:t>
                       </a:r>
                     </a:p>
                   </a:txBody>
@@ -9487,7 +9487,7 @@
                           </a:solidFill>
                           <a:latin typeface="Calibri"/>
                         </a:rPr>
-                        <a:t>4 502</a:t>
+                        <a:t>4 320</a:t>
                       </a:r>
                     </a:p>
                   </a:txBody>
@@ -9509,7 +9509,7 @@
                           </a:solidFill>
                           <a:latin typeface="Calibri"/>
                         </a:rPr>
-                        <a:t>9 216</a:t>
+                        <a:t>8 656</a:t>
                       </a:r>
                     </a:p>
                   </a:txBody>
@@ -9531,7 +9531,7 @@
                           </a:solidFill>
                           <a:latin typeface="Calibri"/>
                         </a:rPr>
-                        <a:t>11 519</a:t>
+                        <a:t>11 510</a:t>
                       </a:r>
                     </a:p>
                   </a:txBody>
@@ -9553,7 +9553,7 @@
                           </a:solidFill>
                           <a:latin typeface="Calibri"/>
                         </a:rPr>
-                        <a:t>14 486</a:t>
+                        <a:t>14 217</a:t>
                       </a:r>
                     </a:p>
                   </a:txBody>
@@ -9577,7 +9577,7 @@
                           </a:solidFill>
                           <a:latin typeface="Calibri"/>
                         </a:rPr>
-                        <a:t>Spring Batch + ff4j</a:t>
+                        <a:t>Spring Batch + fixedlength</a:t>
                       </a:r>
                     </a:p>
                   </a:txBody>
@@ -9599,7 +9599,7 @@
                           </a:solidFill>
                           <a:latin typeface="Calibri"/>
                         </a:rPr>
-                        <a:t>4 371</a:t>
+                        <a:t>4 218</a:t>
                       </a:r>
                     </a:p>
                   </a:txBody>
@@ -9621,7 +9621,7 @@
                           </a:solidFill>
                           <a:latin typeface="Calibri"/>
                         </a:rPr>
-                        <a:t>8 656</a:t>
+                        <a:t>8 956</a:t>
                       </a:r>
                     </a:p>
                   </a:txBody>
@@ -9643,7 +9643,7 @@
                           </a:solidFill>
                           <a:latin typeface="Calibri"/>
                         </a:rPr>
-                        <a:t>11 510</a:t>
+                        <a:t>11 497</a:t>
                       </a:r>
                     </a:p>
                   </a:txBody>
@@ -9665,7 +9665,7 @@
                           </a:solidFill>
                           <a:latin typeface="Calibri"/>
                         </a:rPr>
-                        <a:t>14 587</a:t>
+                        <a:t>14 117</a:t>
                       </a:r>
                     </a:p>
                   </a:txBody>
@@ -9733,7 +9733,7 @@
                           </a:solidFill>
                           <a:latin typeface="Calibri"/>
                         </a:rPr>
-                        <a:t>2 298</a:t>
+                        <a:t>2 179</a:t>
                       </a:r>
                     </a:p>
                   </a:txBody>
@@ -9822,7 +9822,7 @@
                 </a:solidFill>
                 <a:latin typeface="Calibri"/>
               </a:rPr>
-              <a:t>• fixedformat4j wins CODA outright — 1.8x write and 1.7x read versus the next best</a:t>
+              <a:t>• fixedformat4j leads CODA — ~1.3x write and ~1.5x read versus the next best</a:t>
             </a:r>
           </a:p>
         </p:txBody>
@@ -9892,7 +9892,7 @@
                 </a:solidFill>
                 <a:latin typeface="Calibri"/>
               </a:rPr>
-              <a:t>• SWIFT converges (~11k write / ~14k read): shared SwiftMtRecord path; only Velocity stands out</a:t>
+              <a:t>• SWIFT converges (~11k write / ~13-14k read): shared SwiftMtRecord path; only Velocity stands out</a:t>
             </a:r>
           </a:p>
         </p:txBody>
@@ -9927,7 +9927,7 @@
                 </a:solidFill>
                 <a:latin typeface="Calibri"/>
               </a:rPr>
-              <a:t>• ops/s, 1 fork x 3 iterations, Java 21 on Apple Silicon — gaps under ~20% are noise</a:t>
+              <a:t>• ops/s, median of 3 runs, Java 21 on Apple Silicon — gaps under ~20% are noise; measure on a quiet machine</a:t>
             </a:r>
           </a:p>
         </p:txBody>

--- a/docs/slides/banking-parser-platform.pptx
+++ b/docs/slides/banking-parser-platform.pptx
@@ -3190,7 +3190,7 @@
                 </a:solidFill>
                 <a:latin typeface="Calibri"/>
               </a:rPr>
-              <a:t>Banking Fixed-Length File Platform</a:t>
+              <a:t>Banking Fixed-Length File Benchmark Platform</a:t>
             </a:r>
           </a:p>
         </p:txBody>
@@ -8253,7 +8253,7 @@
                           </a:solidFill>
                           <a:latin typeface="Calibri"/>
                         </a:rPr>
-                        <a:t>Spring Batch + ff4j</a:t>
+                        <a:t>Spring Batch + fixedformat4j</a:t>
                       </a:r>
                     </a:p>
                   </a:txBody>
@@ -9465,7 +9465,7 @@
                           </a:solidFill>
                           <a:latin typeface="Calibri"/>
                         </a:rPr>
-                        <a:t>Spring Batch + ff4j</a:t>
+                        <a:t>Spring Batch + fixedformat4j</a:t>
                       </a:r>
                     </a:p>
                   </a:txBody>
@@ -10542,7 +10542,7 @@
                           </a:solidFill>
                           <a:latin typeface="Calibri"/>
                         </a:rPr>
-                        <a:t>Spring Batch + ff4j</a:t>
+                        <a:t>Spring Batch + fixedformat4j</a:t>
                       </a:r>
                     </a:p>
                   </a:txBody>
@@ -15037,7 +15037,7 @@
                 </a:solidFill>
                 <a:latin typeface="Courier New"/>
               </a:rPr>
-              <a:t>  -d '{"fileType":"CODA","library":"SPRING_BATCH_FF4J"}'</a:t>
+              <a:t>  -d '{"fileType":"CODA","library":"SPRING_BATCH_FIXFORMAT4J"}'</a:t>
             </a:r>
           </a:p>
           <a:p>
@@ -16341,7 +16341,7 @@
                 </a:solidFill>
                 <a:latin typeface="Courier New"/>
               </a:rPr>
-              <a:t>                BeanIO  ff4j  VL  Bindy CamelBIO Vel  SB  SB+ff4j  SB+VL</a:t>
+              <a:t>                BeanIO  ff4j  VL  Bindy CamelBIO Vel  SB  SB+FF4J  SB+VL</a:t>
             </a:r>
           </a:p>
           <a:p>
@@ -18915,7 +18915,7 @@
                           </a:solidFill>
                           <a:latin typeface="Calibri"/>
                         </a:rPr>
-                        <a:t>Spring Batch + ff4j</a:t>
+                        <a:t>Spring Batch + fixedformat4j</a:t>
                       </a:r>
                     </a:p>
                   </a:txBody>
@@ -19883,7 +19883,7 @@
                 </a:solidFill>
                 <a:latin typeface="Courier New"/>
               </a:rPr>
-              <a:t>                              // SPRING_BATCH_FF4J | SPRING_BATCH_FIXEDLENGTH</a:t>
+              <a:t>                              // SPRING_BATCH_FIXFORMAT4J | SPRING_BATCH_FIXEDLENGTH</a:t>
             </a:r>
           </a:p>
           <a:p>
@@ -19993,7 +19993,7 @@
                 </a:solidFill>
                 <a:latin typeface="Courier New"/>
               </a:rPr>
-              <a:t>FileGenerationStrategy s = resolver.resolve(FileType.CODA, Library.SPRING_BATCH_FF4J);</a:t>
+              <a:t>FileGenerationStrategy s = resolver.resolve(FileType.CODA, Library.SPRING_BATCH_FIXFORMAT4J);</a:t>
             </a:r>
           </a:p>
           <a:p>

--- a/docs/slides/banking-parser-platform.pptx
+++ b/docs/slides/banking-parser-platform.pptx
@@ -16330,7 +16330,7 @@
                 </a:solidFill>
                 <a:latin typeface="Courier New"/>
               </a:rPr>
-              <a:t>                     /    |    |    |    |    |    |    |    \</a:t>
+              <a:t>                                      |</a:t>
             </a:r>
           </a:p>
           <a:p>
@@ -16341,7 +16341,7 @@
                 </a:solidFill>
                 <a:latin typeface="Courier New"/>
               </a:rPr>
-              <a:t>                BeanIO  ff4j  VL  Bindy CamelBIO Vel  SB  SB+FF4J  SB+VL</a:t>
+              <a:t>        BeanIO, FixedFormat4J, FixedLength, Bindy, CamelBeanIO, Velocity,</a:t>
             </a:r>
           </a:p>
           <a:p>
@@ -16352,7 +16352,18 @@
                 </a:solidFill>
                 <a:latin typeface="Courier New"/>
               </a:rPr>
-              <a:t>                              |</a:t>
+              <a:t>        SpringBatch, SpringBatch+FixedFormat4J, SpringBatch+FixedLength</a:t>
+            </a:r>
+          </a:p>
+          <a:p>
+            <a:r>
+              <a:rPr sz="1300">
+                <a:solidFill>
+                  <a:srgbClr val="D4D4D4"/>
+                </a:solidFill>
+                <a:latin typeface="Courier New"/>
+              </a:rPr>
+              <a:t>                                      |</a:t>
             </a:r>
           </a:p>
           <a:p>
